--- a/demo_site/files/slides/lecture22_amdahls_wisdom.pptx
+++ b/demo_site/files/slides/lecture22_amdahls_wisdom.pptx
@@ -4626,15 +4626,15 @@
             </a:br>
             <a:r>
               <a:rPr lang="en-US" dirty="0"/>
-              <a:t>Lecture 22: </a:t>
-            </a:r>
-            <a:r>
-              <a:rPr lang="en-US" dirty="0" err="1"/>
-              <a:t>Amdah’s</a:t>
-            </a:r>
-            <a:r>
-              <a:rPr lang="en-US" dirty="0"/>
-              <a:t> Law and Wisdom</a:t>
+              <a:t>Lecture 22</a:t>
+            </a:r>
+            <a:r>
+              <a:rPr lang="en-US"/>
+              <a:t>: Amdahl’s </a:t>
+            </a:r>
+            <a:r>
+              <a:rPr lang="en-US" dirty="0"/>
+              <a:t>Law and Wisdom</a:t>
             </a:r>
           </a:p>
         </p:txBody>
